--- a/與祢一起.pptx
+++ b/與祢一起.pptx
@@ -158,7 +158,7 @@
           <a:lstStyle/>
           <a:p>
             <a:r>
-              <a:rPr lang="en-US" altLang="zh-TW" smtClean="0"/>
+              <a:rPr lang="en-US" altLang="zh-TW"/>
               <a:t>Click to edit Master title style</a:t>
             </a:r>
             <a:endParaRPr lang="zh-TW" altLang="en-US"/>
@@ -277,7 +277,7 @@
           </a:lstStyle>
           <a:p>
             <a:r>
-              <a:rPr lang="en-US" altLang="zh-TW" smtClean="0"/>
+              <a:rPr lang="en-US" altLang="zh-TW"/>
               <a:t>Click to edit Master subtitle style</a:t>
             </a:r>
             <a:endParaRPr lang="zh-TW" altLang="en-US"/>
@@ -301,7 +301,7 @@
           <a:p>
             <a:fld id="{A9C8C329-CF0D-4B67-8B94-DAFA47238192}" type="datetimeFigureOut">
               <a:rPr lang="vi-VN" smtClean="0"/>
-              <a:t>22/01/2022</a:t>
+              <a:t>05/07/2025</a:t>
             </a:fld>
             <a:endParaRPr lang="vi-VN"/>
           </a:p>
@@ -395,7 +395,7 @@
           <a:lstStyle/>
           <a:p>
             <a:r>
-              <a:rPr lang="en-US" altLang="zh-TW" smtClean="0"/>
+              <a:rPr lang="en-US" altLang="zh-TW"/>
               <a:t>Click to edit Master title style</a:t>
             </a:r>
             <a:endParaRPr lang="zh-TW" altLang="en-US"/>
@@ -419,35 +419,35 @@
           <a:p>
             <a:pPr lvl="0"/>
             <a:r>
-              <a:rPr lang="en-US" altLang="zh-TW" smtClean="0"/>
+              <a:rPr lang="en-US" altLang="zh-TW"/>
               <a:t>Edit Master text styles</a:t>
             </a:r>
           </a:p>
           <a:p>
             <a:pPr lvl="1"/>
             <a:r>
-              <a:rPr lang="en-US" altLang="zh-TW" smtClean="0"/>
+              <a:rPr lang="en-US" altLang="zh-TW"/>
               <a:t>Second level</a:t>
             </a:r>
           </a:p>
           <a:p>
             <a:pPr lvl="2"/>
             <a:r>
-              <a:rPr lang="en-US" altLang="zh-TW" smtClean="0"/>
+              <a:rPr lang="en-US" altLang="zh-TW"/>
               <a:t>Third level</a:t>
             </a:r>
           </a:p>
           <a:p>
             <a:pPr lvl="3"/>
             <a:r>
-              <a:rPr lang="en-US" altLang="zh-TW" smtClean="0"/>
+              <a:rPr lang="en-US" altLang="zh-TW"/>
               <a:t>Fourth level</a:t>
             </a:r>
           </a:p>
           <a:p>
             <a:pPr lvl="4"/>
             <a:r>
-              <a:rPr lang="en-US" altLang="zh-TW" smtClean="0"/>
+              <a:rPr lang="en-US" altLang="zh-TW"/>
               <a:t>Fifth level</a:t>
             </a:r>
             <a:endParaRPr lang="zh-TW" altLang="en-US"/>
@@ -471,7 +471,7 @@
           <a:p>
             <a:fld id="{A9C8C329-CF0D-4B67-8B94-DAFA47238192}" type="datetimeFigureOut">
               <a:rPr lang="vi-VN" smtClean="0"/>
-              <a:t>22/01/2022</a:t>
+              <a:t>05/07/2025</a:t>
             </a:fld>
             <a:endParaRPr lang="vi-VN"/>
           </a:p>
@@ -570,7 +570,7 @@
           <a:lstStyle/>
           <a:p>
             <a:r>
-              <a:rPr lang="en-US" altLang="zh-TW" smtClean="0"/>
+              <a:rPr lang="en-US" altLang="zh-TW"/>
               <a:t>Click to edit Master title style</a:t>
             </a:r>
             <a:endParaRPr lang="zh-TW" altLang="en-US"/>
@@ -599,35 +599,35 @@
           <a:p>
             <a:pPr lvl="0"/>
             <a:r>
-              <a:rPr lang="en-US" altLang="zh-TW" smtClean="0"/>
+              <a:rPr lang="en-US" altLang="zh-TW"/>
               <a:t>Edit Master text styles</a:t>
             </a:r>
           </a:p>
           <a:p>
             <a:pPr lvl="1"/>
             <a:r>
-              <a:rPr lang="en-US" altLang="zh-TW" smtClean="0"/>
+              <a:rPr lang="en-US" altLang="zh-TW"/>
               <a:t>Second level</a:t>
             </a:r>
           </a:p>
           <a:p>
             <a:pPr lvl="2"/>
             <a:r>
-              <a:rPr lang="en-US" altLang="zh-TW" smtClean="0"/>
+              <a:rPr lang="en-US" altLang="zh-TW"/>
               <a:t>Third level</a:t>
             </a:r>
           </a:p>
           <a:p>
             <a:pPr lvl="3"/>
             <a:r>
-              <a:rPr lang="en-US" altLang="zh-TW" smtClean="0"/>
+              <a:rPr lang="en-US" altLang="zh-TW"/>
               <a:t>Fourth level</a:t>
             </a:r>
           </a:p>
           <a:p>
             <a:pPr lvl="4"/>
             <a:r>
-              <a:rPr lang="en-US" altLang="zh-TW" smtClean="0"/>
+              <a:rPr lang="en-US" altLang="zh-TW"/>
               <a:t>Fifth level</a:t>
             </a:r>
             <a:endParaRPr lang="zh-TW" altLang="en-US"/>
@@ -651,7 +651,7 @@
           <a:p>
             <a:fld id="{A9C8C329-CF0D-4B67-8B94-DAFA47238192}" type="datetimeFigureOut">
               <a:rPr lang="vi-VN" smtClean="0"/>
-              <a:t>22/01/2022</a:t>
+              <a:t>05/07/2025</a:t>
             </a:fld>
             <a:endParaRPr lang="vi-VN"/>
           </a:p>
@@ -745,7 +745,7 @@
           <a:lstStyle/>
           <a:p>
             <a:r>
-              <a:rPr lang="en-US" altLang="zh-TW" smtClean="0"/>
+              <a:rPr lang="en-US" altLang="zh-TW"/>
               <a:t>Click to edit Master title style</a:t>
             </a:r>
             <a:endParaRPr lang="zh-TW" altLang="en-US"/>
@@ -769,35 +769,35 @@
           <a:p>
             <a:pPr lvl="0"/>
             <a:r>
-              <a:rPr lang="en-US" altLang="zh-TW" smtClean="0"/>
+              <a:rPr lang="en-US" altLang="zh-TW"/>
               <a:t>Edit Master text styles</a:t>
             </a:r>
           </a:p>
           <a:p>
             <a:pPr lvl="1"/>
             <a:r>
-              <a:rPr lang="en-US" altLang="zh-TW" smtClean="0"/>
+              <a:rPr lang="en-US" altLang="zh-TW"/>
               <a:t>Second level</a:t>
             </a:r>
           </a:p>
           <a:p>
             <a:pPr lvl="2"/>
             <a:r>
-              <a:rPr lang="en-US" altLang="zh-TW" smtClean="0"/>
+              <a:rPr lang="en-US" altLang="zh-TW"/>
               <a:t>Third level</a:t>
             </a:r>
           </a:p>
           <a:p>
             <a:pPr lvl="3"/>
             <a:r>
-              <a:rPr lang="en-US" altLang="zh-TW" smtClean="0"/>
+              <a:rPr lang="en-US" altLang="zh-TW"/>
               <a:t>Fourth level</a:t>
             </a:r>
           </a:p>
           <a:p>
             <a:pPr lvl="4"/>
             <a:r>
-              <a:rPr lang="en-US" altLang="zh-TW" smtClean="0"/>
+              <a:rPr lang="en-US" altLang="zh-TW"/>
               <a:t>Fifth level</a:t>
             </a:r>
             <a:endParaRPr lang="zh-TW" altLang="en-US"/>
@@ -821,7 +821,7 @@
           <a:p>
             <a:fld id="{A9C8C329-CF0D-4B67-8B94-DAFA47238192}" type="datetimeFigureOut">
               <a:rPr lang="vi-VN" smtClean="0"/>
-              <a:t>22/01/2022</a:t>
+              <a:t>05/07/2025</a:t>
             </a:fld>
             <a:endParaRPr lang="vi-VN"/>
           </a:p>
@@ -924,7 +924,7 @@
           </a:lstStyle>
           <a:p>
             <a:r>
-              <a:rPr lang="en-US" altLang="zh-TW" smtClean="0"/>
+              <a:rPr lang="en-US" altLang="zh-TW"/>
               <a:t>Click to edit Master title style</a:t>
             </a:r>
             <a:endParaRPr lang="zh-TW" altLang="en-US"/>
@@ -1044,7 +1044,7 @@
           <a:p>
             <a:pPr lvl="0"/>
             <a:r>
-              <a:rPr lang="en-US" altLang="zh-TW" smtClean="0"/>
+              <a:rPr lang="en-US" altLang="zh-TW"/>
               <a:t>Edit Master text styles</a:t>
             </a:r>
           </a:p>
@@ -1067,7 +1067,7 @@
           <a:p>
             <a:fld id="{A9C8C329-CF0D-4B67-8B94-DAFA47238192}" type="datetimeFigureOut">
               <a:rPr lang="vi-VN" smtClean="0"/>
-              <a:t>22/01/2022</a:t>
+              <a:t>05/07/2025</a:t>
             </a:fld>
             <a:endParaRPr lang="vi-VN"/>
           </a:p>
@@ -1161,7 +1161,7 @@
           <a:lstStyle/>
           <a:p>
             <a:r>
-              <a:rPr lang="en-US" altLang="zh-TW" smtClean="0"/>
+              <a:rPr lang="en-US" altLang="zh-TW"/>
               <a:t>Click to edit Master title style</a:t>
             </a:r>
             <a:endParaRPr lang="zh-TW" altLang="en-US"/>
@@ -1218,35 +1218,35 @@
           <a:p>
             <a:pPr lvl="0"/>
             <a:r>
-              <a:rPr lang="en-US" altLang="zh-TW" smtClean="0"/>
+              <a:rPr lang="en-US" altLang="zh-TW"/>
               <a:t>Edit Master text styles</a:t>
             </a:r>
           </a:p>
           <a:p>
             <a:pPr lvl="1"/>
             <a:r>
-              <a:rPr lang="en-US" altLang="zh-TW" smtClean="0"/>
+              <a:rPr lang="en-US" altLang="zh-TW"/>
               <a:t>Second level</a:t>
             </a:r>
           </a:p>
           <a:p>
             <a:pPr lvl="2"/>
             <a:r>
-              <a:rPr lang="en-US" altLang="zh-TW" smtClean="0"/>
+              <a:rPr lang="en-US" altLang="zh-TW"/>
               <a:t>Third level</a:t>
             </a:r>
           </a:p>
           <a:p>
             <a:pPr lvl="3"/>
             <a:r>
-              <a:rPr lang="en-US" altLang="zh-TW" smtClean="0"/>
+              <a:rPr lang="en-US" altLang="zh-TW"/>
               <a:t>Fourth level</a:t>
             </a:r>
           </a:p>
           <a:p>
             <a:pPr lvl="4"/>
             <a:r>
-              <a:rPr lang="en-US" altLang="zh-TW" smtClean="0"/>
+              <a:rPr lang="en-US" altLang="zh-TW"/>
               <a:t>Fifth level</a:t>
             </a:r>
             <a:endParaRPr lang="zh-TW" altLang="en-US"/>
@@ -1303,35 +1303,35 @@
           <a:p>
             <a:pPr lvl="0"/>
             <a:r>
-              <a:rPr lang="en-US" altLang="zh-TW" smtClean="0"/>
+              <a:rPr lang="en-US" altLang="zh-TW"/>
               <a:t>Edit Master text styles</a:t>
             </a:r>
           </a:p>
           <a:p>
             <a:pPr lvl="1"/>
             <a:r>
-              <a:rPr lang="en-US" altLang="zh-TW" smtClean="0"/>
+              <a:rPr lang="en-US" altLang="zh-TW"/>
               <a:t>Second level</a:t>
             </a:r>
           </a:p>
           <a:p>
             <a:pPr lvl="2"/>
             <a:r>
-              <a:rPr lang="en-US" altLang="zh-TW" smtClean="0"/>
+              <a:rPr lang="en-US" altLang="zh-TW"/>
               <a:t>Third level</a:t>
             </a:r>
           </a:p>
           <a:p>
             <a:pPr lvl="3"/>
             <a:r>
-              <a:rPr lang="en-US" altLang="zh-TW" smtClean="0"/>
+              <a:rPr lang="en-US" altLang="zh-TW"/>
               <a:t>Fourth level</a:t>
             </a:r>
           </a:p>
           <a:p>
             <a:pPr lvl="4"/>
             <a:r>
-              <a:rPr lang="en-US" altLang="zh-TW" smtClean="0"/>
+              <a:rPr lang="en-US" altLang="zh-TW"/>
               <a:t>Fifth level</a:t>
             </a:r>
             <a:endParaRPr lang="zh-TW" altLang="en-US"/>
@@ -1355,7 +1355,7 @@
           <a:p>
             <a:fld id="{A9C8C329-CF0D-4B67-8B94-DAFA47238192}" type="datetimeFigureOut">
               <a:rPr lang="vi-VN" smtClean="0"/>
-              <a:t>22/01/2022</a:t>
+              <a:t>05/07/2025</a:t>
             </a:fld>
             <a:endParaRPr lang="vi-VN"/>
           </a:p>
@@ -1453,7 +1453,7 @@
           </a:lstStyle>
           <a:p>
             <a:r>
-              <a:rPr lang="en-US" altLang="zh-TW" smtClean="0"/>
+              <a:rPr lang="en-US" altLang="zh-TW"/>
               <a:t>Click to edit Master title style</a:t>
             </a:r>
             <a:endParaRPr lang="zh-TW" altLang="en-US"/>
@@ -1519,7 +1519,7 @@
           <a:p>
             <a:pPr lvl="0"/>
             <a:r>
-              <a:rPr lang="en-US" altLang="zh-TW" smtClean="0"/>
+              <a:rPr lang="en-US" altLang="zh-TW"/>
               <a:t>Edit Master text styles</a:t>
             </a:r>
           </a:p>
@@ -1575,35 +1575,35 @@
           <a:p>
             <a:pPr lvl="0"/>
             <a:r>
-              <a:rPr lang="en-US" altLang="zh-TW" smtClean="0"/>
+              <a:rPr lang="en-US" altLang="zh-TW"/>
               <a:t>Edit Master text styles</a:t>
             </a:r>
           </a:p>
           <a:p>
             <a:pPr lvl="1"/>
             <a:r>
-              <a:rPr lang="en-US" altLang="zh-TW" smtClean="0"/>
+              <a:rPr lang="en-US" altLang="zh-TW"/>
               <a:t>Second level</a:t>
             </a:r>
           </a:p>
           <a:p>
             <a:pPr lvl="2"/>
             <a:r>
-              <a:rPr lang="en-US" altLang="zh-TW" smtClean="0"/>
+              <a:rPr lang="en-US" altLang="zh-TW"/>
               <a:t>Third level</a:t>
             </a:r>
           </a:p>
           <a:p>
             <a:pPr lvl="3"/>
             <a:r>
-              <a:rPr lang="en-US" altLang="zh-TW" smtClean="0"/>
+              <a:rPr lang="en-US" altLang="zh-TW"/>
               <a:t>Fourth level</a:t>
             </a:r>
           </a:p>
           <a:p>
             <a:pPr lvl="4"/>
             <a:r>
-              <a:rPr lang="en-US" altLang="zh-TW" smtClean="0"/>
+              <a:rPr lang="en-US" altLang="zh-TW"/>
               <a:t>Fifth level</a:t>
             </a:r>
             <a:endParaRPr lang="zh-TW" altLang="en-US"/>
@@ -1669,7 +1669,7 @@
           <a:p>
             <a:pPr lvl="0"/>
             <a:r>
-              <a:rPr lang="en-US" altLang="zh-TW" smtClean="0"/>
+              <a:rPr lang="en-US" altLang="zh-TW"/>
               <a:t>Edit Master text styles</a:t>
             </a:r>
           </a:p>
@@ -1725,35 +1725,35 @@
           <a:p>
             <a:pPr lvl="0"/>
             <a:r>
-              <a:rPr lang="en-US" altLang="zh-TW" smtClean="0"/>
+              <a:rPr lang="en-US" altLang="zh-TW"/>
               <a:t>Edit Master text styles</a:t>
             </a:r>
           </a:p>
           <a:p>
             <a:pPr lvl="1"/>
             <a:r>
-              <a:rPr lang="en-US" altLang="zh-TW" smtClean="0"/>
+              <a:rPr lang="en-US" altLang="zh-TW"/>
               <a:t>Second level</a:t>
             </a:r>
           </a:p>
           <a:p>
             <a:pPr lvl="2"/>
             <a:r>
-              <a:rPr lang="en-US" altLang="zh-TW" smtClean="0"/>
+              <a:rPr lang="en-US" altLang="zh-TW"/>
               <a:t>Third level</a:t>
             </a:r>
           </a:p>
           <a:p>
             <a:pPr lvl="3"/>
             <a:r>
-              <a:rPr lang="en-US" altLang="zh-TW" smtClean="0"/>
+              <a:rPr lang="en-US" altLang="zh-TW"/>
               <a:t>Fourth level</a:t>
             </a:r>
           </a:p>
           <a:p>
             <a:pPr lvl="4"/>
             <a:r>
-              <a:rPr lang="en-US" altLang="zh-TW" smtClean="0"/>
+              <a:rPr lang="en-US" altLang="zh-TW"/>
               <a:t>Fifth level</a:t>
             </a:r>
             <a:endParaRPr lang="zh-TW" altLang="en-US"/>
@@ -1777,7 +1777,7 @@
           <a:p>
             <a:fld id="{A9C8C329-CF0D-4B67-8B94-DAFA47238192}" type="datetimeFigureOut">
               <a:rPr lang="vi-VN" smtClean="0"/>
-              <a:t>22/01/2022</a:t>
+              <a:t>05/07/2025</a:t>
             </a:fld>
             <a:endParaRPr lang="vi-VN"/>
           </a:p>
@@ -1871,7 +1871,7 @@
           <a:lstStyle/>
           <a:p>
             <a:r>
-              <a:rPr lang="en-US" altLang="zh-TW" smtClean="0"/>
+              <a:rPr lang="en-US" altLang="zh-TW"/>
               <a:t>Click to edit Master title style</a:t>
             </a:r>
             <a:endParaRPr lang="zh-TW" altLang="en-US"/>
@@ -1895,7 +1895,7 @@
           <a:p>
             <a:fld id="{A9C8C329-CF0D-4B67-8B94-DAFA47238192}" type="datetimeFigureOut">
               <a:rPr lang="vi-VN" smtClean="0"/>
-              <a:t>22/01/2022</a:t>
+              <a:t>05/07/2025</a:t>
             </a:fld>
             <a:endParaRPr lang="vi-VN"/>
           </a:p>
@@ -1990,7 +1990,7 @@
           <a:p>
             <a:fld id="{A9C8C329-CF0D-4B67-8B94-DAFA47238192}" type="datetimeFigureOut">
               <a:rPr lang="vi-VN" smtClean="0"/>
-              <a:t>22/01/2022</a:t>
+              <a:t>05/07/2025</a:t>
             </a:fld>
             <a:endParaRPr lang="vi-VN"/>
           </a:p>
@@ -2093,7 +2093,7 @@
           </a:lstStyle>
           <a:p>
             <a:r>
-              <a:rPr lang="en-US" altLang="zh-TW" smtClean="0"/>
+              <a:rPr lang="en-US" altLang="zh-TW"/>
               <a:t>Click to edit Master title style</a:t>
             </a:r>
             <a:endParaRPr lang="zh-TW" altLang="en-US"/>
@@ -2150,35 +2150,35 @@
           <a:p>
             <a:pPr lvl="0"/>
             <a:r>
-              <a:rPr lang="en-US" altLang="zh-TW" smtClean="0"/>
+              <a:rPr lang="en-US" altLang="zh-TW"/>
               <a:t>Edit Master text styles</a:t>
             </a:r>
           </a:p>
           <a:p>
             <a:pPr lvl="1"/>
             <a:r>
-              <a:rPr lang="en-US" altLang="zh-TW" smtClean="0"/>
+              <a:rPr lang="en-US" altLang="zh-TW"/>
               <a:t>Second level</a:t>
             </a:r>
           </a:p>
           <a:p>
             <a:pPr lvl="2"/>
             <a:r>
-              <a:rPr lang="en-US" altLang="zh-TW" smtClean="0"/>
+              <a:rPr lang="en-US" altLang="zh-TW"/>
               <a:t>Third level</a:t>
             </a:r>
           </a:p>
           <a:p>
             <a:pPr lvl="3"/>
             <a:r>
-              <a:rPr lang="en-US" altLang="zh-TW" smtClean="0"/>
+              <a:rPr lang="en-US" altLang="zh-TW"/>
               <a:t>Fourth level</a:t>
             </a:r>
           </a:p>
           <a:p>
             <a:pPr lvl="4"/>
             <a:r>
-              <a:rPr lang="en-US" altLang="zh-TW" smtClean="0"/>
+              <a:rPr lang="en-US" altLang="zh-TW"/>
               <a:t>Fifth level</a:t>
             </a:r>
             <a:endParaRPr lang="zh-TW" altLang="en-US"/>
@@ -2244,7 +2244,7 @@
           <a:p>
             <a:pPr lvl="0"/>
             <a:r>
-              <a:rPr lang="en-US" altLang="zh-TW" smtClean="0"/>
+              <a:rPr lang="en-US" altLang="zh-TW"/>
               <a:t>Edit Master text styles</a:t>
             </a:r>
           </a:p>
@@ -2267,7 +2267,7 @@
           <a:p>
             <a:fld id="{A9C8C329-CF0D-4B67-8B94-DAFA47238192}" type="datetimeFigureOut">
               <a:rPr lang="vi-VN" smtClean="0"/>
-              <a:t>22/01/2022</a:t>
+              <a:t>05/07/2025</a:t>
             </a:fld>
             <a:endParaRPr lang="vi-VN"/>
           </a:p>
@@ -2370,7 +2370,7 @@
           </a:lstStyle>
           <a:p>
             <a:r>
-              <a:rPr lang="en-US" altLang="zh-TW" smtClean="0"/>
+              <a:rPr lang="en-US" altLang="zh-TW"/>
               <a:t>Click to edit Master title style</a:t>
             </a:r>
             <a:endParaRPr lang="zh-TW" altLang="en-US"/>
@@ -2435,7 +2435,7 @@
           </a:lstStyle>
           <a:p>
             <a:r>
-              <a:rPr lang="en-US" altLang="zh-TW" smtClean="0"/>
+              <a:rPr lang="en-US" altLang="zh-TW"/>
               <a:t>Click icon to add picture</a:t>
             </a:r>
             <a:endParaRPr lang="zh-TW" altLang="en-US"/>
@@ -2501,7 +2501,7 @@
           <a:p>
             <a:pPr lvl="0"/>
             <a:r>
-              <a:rPr lang="en-US" altLang="zh-TW" smtClean="0"/>
+              <a:rPr lang="en-US" altLang="zh-TW"/>
               <a:t>Edit Master text styles</a:t>
             </a:r>
           </a:p>
@@ -2524,7 +2524,7 @@
           <a:p>
             <a:fld id="{A9C8C329-CF0D-4B67-8B94-DAFA47238192}" type="datetimeFigureOut">
               <a:rPr lang="vi-VN" smtClean="0"/>
-              <a:t>22/01/2022</a:t>
+              <a:t>05/07/2025</a:t>
             </a:fld>
             <a:endParaRPr lang="vi-VN"/>
           </a:p>
@@ -2638,10 +2638,9 @@
           <a:lstStyle/>
           <a:p>
             <a:r>
-              <a:rPr lang="zh-TW" altLang="en-US" smtClean="0"/>
+              <a:rPr lang="zh-TW" altLang="en-US"/>
               <a:t>按一下以編輯母片標題樣式</a:t>
             </a:r>
-            <a:endParaRPr lang="zh-TW" altLang="en-US"/>
           </a:p>
         </p:txBody>
       </p:sp>
@@ -2672,38 +2671,37 @@
           <a:p>
             <a:pPr lvl="0"/>
             <a:r>
-              <a:rPr lang="zh-TW" altLang="en-US" smtClean="0"/>
+              <a:rPr lang="zh-TW" altLang="en-US"/>
               <a:t>按一下以編輯母片文字樣式</a:t>
             </a:r>
           </a:p>
           <a:p>
             <a:pPr lvl="1"/>
             <a:r>
-              <a:rPr lang="zh-TW" altLang="en-US" smtClean="0"/>
+              <a:rPr lang="zh-TW" altLang="en-US"/>
               <a:t>第二層</a:t>
             </a:r>
           </a:p>
           <a:p>
             <a:pPr lvl="2"/>
             <a:r>
-              <a:rPr lang="zh-TW" altLang="en-US" smtClean="0"/>
+              <a:rPr lang="zh-TW" altLang="en-US"/>
               <a:t>第三層</a:t>
             </a:r>
           </a:p>
           <a:p>
             <a:pPr lvl="3"/>
             <a:r>
-              <a:rPr lang="zh-TW" altLang="en-US" smtClean="0"/>
+              <a:rPr lang="zh-TW" altLang="en-US"/>
               <a:t>第四層</a:t>
             </a:r>
           </a:p>
           <a:p>
             <a:pPr lvl="4"/>
             <a:r>
-              <a:rPr lang="zh-TW" altLang="en-US" smtClean="0"/>
+              <a:rPr lang="zh-TW" altLang="en-US"/>
               <a:t>第五層</a:t>
             </a:r>
-            <a:endParaRPr lang="zh-TW" altLang="en-US"/>
           </a:p>
         </p:txBody>
       </p:sp>
@@ -2742,7 +2740,7 @@
           <a:p>
             <a:fld id="{A9C8C329-CF0D-4B67-8B94-DAFA47238192}" type="datetimeFigureOut">
               <a:rPr lang="vi-VN" smtClean="0"/>
-              <a:t>22/01/2022</a:t>
+              <a:t>05/07/2025</a:t>
             </a:fld>
             <a:endParaRPr lang="vi-VN"/>
           </a:p>
@@ -3129,7 +3127,7 @@
         </p:nvSpPr>
         <p:spPr>
           <a:xfrm>
-            <a:off x="0" y="2857513"/>
+            <a:off x="0" y="2621538"/>
             <a:ext cx="12192000" cy="1143000"/>
           </a:xfrm>
         </p:spPr>
@@ -3154,24 +3152,7 @@
                 <a:latin typeface="微軟正黑體" pitchFamily="34" charset="-120"/>
                 <a:ea typeface="微軟正黑體" pitchFamily="34" charset="-120"/>
               </a:rPr>
-              <a:t>與</a:t>
-            </a:r>
-            <a:r>
-              <a:rPr lang="zh-CN" altLang="en-US" sz="7200" b="1" i="1" dirty="0">
-                <a:solidFill>
-                  <a:srgbClr val="660033"/>
-                </a:solidFill>
-                <a:effectLst>
-                  <a:outerShdw blurRad="38100" dist="38100" dir="2700000" algn="tl">
-                    <a:srgbClr val="000000">
-                      <a:alpha val="43137"/>
-                    </a:srgbClr>
-                  </a:outerShdw>
-                </a:effectLst>
-                <a:latin typeface="微軟正黑體" pitchFamily="34" charset="-120"/>
-                <a:ea typeface="微軟正黑體" pitchFamily="34" charset="-120"/>
-              </a:rPr>
-              <a:t>祢一起</a:t>
+              <a:t>與祢一起</a:t>
             </a:r>
             <a:endParaRPr lang="zh-TW" altLang="en-US" sz="7200" b="1" i="1" dirty="0">
               <a:solidFill>
@@ -3330,7 +3311,7 @@
                 <a:latin typeface="Microsoft JhengHei" panose="020B0604030504040204" pitchFamily="34" charset="-120"/>
                 <a:ea typeface="Microsoft JhengHei" panose="020B0604030504040204" pitchFamily="34" charset="-120"/>
               </a:rPr>
-              <a:t>正</a:t>
+              <a:t>正歌</a:t>
             </a:r>
             <a:r>
               <a:rPr lang="en-US" sz="4800" b="1" dirty="0">
@@ -3341,18 +3322,7 @@
                 <a:latin typeface="Microsoft JhengHei" panose="020B0604030504040204" pitchFamily="34" charset="-120"/>
                 <a:ea typeface="Microsoft JhengHei" panose="020B0604030504040204" pitchFamily="34" charset="-120"/>
               </a:rPr>
-              <a:t> </a:t>
-            </a:r>
-            <a:r>
-              <a:rPr lang="en-US" sz="4800" b="1" dirty="0">
-                <a:solidFill>
-                  <a:srgbClr val="660033"/>
-                </a:solidFill>
-                <a:effectLst/>
-                <a:latin typeface="Microsoft JhengHei" panose="020B0604030504040204" pitchFamily="34" charset="-120"/>
-                <a:ea typeface="Microsoft JhengHei" panose="020B0604030504040204" pitchFamily="34" charset="-120"/>
-              </a:rPr>
-              <a:t>)</a:t>
+              <a:t> )</a:t>
             </a:r>
             <a:endParaRPr lang="vi-VN" sz="4800" b="1" dirty="0">
               <a:solidFill>
@@ -3427,27 +3397,7 @@
                 <a:latin typeface="Microsoft JhengHei" panose="020B0604030504040204" pitchFamily="34" charset="-120"/>
                 <a:ea typeface="Microsoft JhengHei" panose="020B0604030504040204" pitchFamily="34" charset="-120"/>
               </a:rPr>
-              <a:t>我得享安息 </a:t>
-            </a:r>
-            <a:r>
-              <a:rPr lang="zh-TW" altLang="en-US" sz="6400" b="1" dirty="0">
-                <a:solidFill>
-                  <a:srgbClr val="660033"/>
-                </a:solidFill>
-                <a:latin typeface="Microsoft JhengHei" panose="020B0604030504040204" pitchFamily="34" charset="-120"/>
-                <a:ea typeface="Microsoft JhengHei" panose="020B0604030504040204" pitchFamily="34" charset="-120"/>
-              </a:rPr>
-              <a:t> 祢</a:t>
-            </a:r>
-            <a:r>
-              <a:rPr lang="zh-TW" altLang="en-US" sz="6400" b="1" dirty="0">
-                <a:solidFill>
-                  <a:srgbClr val="660033"/>
-                </a:solidFill>
-                <a:latin typeface="Microsoft JhengHei" panose="020B0604030504040204" pitchFamily="34" charset="-120"/>
-                <a:ea typeface="Microsoft JhengHei" panose="020B0604030504040204" pitchFamily="34" charset="-120"/>
-              </a:rPr>
-              <a:t>撫慰我心傷處 </a:t>
+              <a:t>我得享安息  祢撫慰我心傷處 </a:t>
             </a:r>
             <a:endParaRPr lang="en-US" altLang="zh-TW" sz="6400" b="1" dirty="0">
               <a:solidFill>
@@ -3469,27 +3419,7 @@
                 <a:latin typeface="Microsoft JhengHei" panose="020B0604030504040204" pitchFamily="34" charset="-120"/>
                 <a:ea typeface="Microsoft JhengHei" panose="020B0604030504040204" pitchFamily="34" charset="-120"/>
               </a:rPr>
-              <a:t>可倚靠祢 </a:t>
-            </a:r>
-            <a:r>
-              <a:rPr lang="zh-TW" altLang="en-US" sz="6400" b="1" dirty="0">
-                <a:solidFill>
-                  <a:srgbClr val="660033"/>
-                </a:solidFill>
-                <a:latin typeface="Microsoft JhengHei" panose="020B0604030504040204" pitchFamily="34" charset="-120"/>
-                <a:ea typeface="Microsoft JhengHei" panose="020B0604030504040204" pitchFamily="34" charset="-120"/>
-              </a:rPr>
-              <a:t> 未</a:t>
-            </a:r>
-            <a:r>
-              <a:rPr lang="zh-TW" altLang="en-US" sz="6400" b="1" dirty="0">
-                <a:solidFill>
-                  <a:srgbClr val="660033"/>
-                </a:solidFill>
-                <a:latin typeface="Microsoft JhengHei" panose="020B0604030504040204" pitchFamily="34" charset="-120"/>
-                <a:ea typeface="Microsoft JhengHei" panose="020B0604030504040204" pitchFamily="34" charset="-120"/>
-              </a:rPr>
-              <a:t>懼洪濤風雨</a:t>
+              <a:t>可倚靠祢  未懼洪濤風雨</a:t>
             </a:r>
             <a:endParaRPr lang="vi-VN" sz="6400" b="1" dirty="0">
               <a:solidFill>
@@ -3529,7 +3459,6 @@
                 <a:solidFill>
                   <a:srgbClr val="660033"/>
                 </a:solidFill>
-                <a:effectLst/>
                 <a:latin typeface="Microsoft JhengHei" panose="020B0604030504040204" pitchFamily="34" charset="-120"/>
                 <a:ea typeface="Microsoft JhengHei" panose="020B0604030504040204" pitchFamily="34" charset="-120"/>
               </a:rPr>
@@ -3540,39 +3469,25 @@
                 <a:solidFill>
                   <a:srgbClr val="660033"/>
                 </a:solidFill>
-                <a:effectLst/>
                 <a:latin typeface="Microsoft JhengHei" panose="020B0604030504040204" pitchFamily="34" charset="-120"/>
                 <a:ea typeface="Microsoft JhengHei" panose="020B0604030504040204" pitchFamily="34" charset="-120"/>
               </a:rPr>
-              <a:t>正</a:t>
+              <a:t>正歌</a:t>
             </a:r>
             <a:r>
               <a:rPr lang="en-US" sz="4800" b="1" dirty="0">
                 <a:solidFill>
                   <a:srgbClr val="660033"/>
                 </a:solidFill>
-                <a:effectLst/>
                 <a:latin typeface="Microsoft JhengHei" panose="020B0604030504040204" pitchFamily="34" charset="-120"/>
                 <a:ea typeface="Microsoft JhengHei" panose="020B0604030504040204" pitchFamily="34" charset="-120"/>
               </a:rPr>
-              <a:t> </a:t>
-            </a:r>
-            <a:r>
-              <a:rPr lang="en-US" sz="4800" b="1" dirty="0">
-                <a:solidFill>
-                  <a:srgbClr val="660033"/>
-                </a:solidFill>
-                <a:effectLst/>
-                <a:latin typeface="Microsoft JhengHei" panose="020B0604030504040204" pitchFamily="34" charset="-120"/>
-                <a:ea typeface="Microsoft JhengHei" panose="020B0604030504040204" pitchFamily="34" charset="-120"/>
-              </a:rPr>
-              <a:t>)</a:t>
+              <a:t> )</a:t>
             </a:r>
             <a:endParaRPr lang="vi-VN" sz="4800" b="1" dirty="0">
               <a:solidFill>
                 <a:srgbClr val="660033"/>
               </a:solidFill>
-              <a:effectLst/>
               <a:ea typeface="Microsoft JhengHei" panose="020B0604030504040204" pitchFamily="34" charset="-120"/>
             </a:endParaRPr>
           </a:p>
@@ -3641,27 +3556,7 @@
                 <a:latin typeface="Microsoft JhengHei" panose="020B0604030504040204" pitchFamily="34" charset="-120"/>
                 <a:ea typeface="Microsoft JhengHei" panose="020B0604030504040204" pitchFamily="34" charset="-120"/>
               </a:rPr>
-              <a:t>謝謝祢的愛 </a:t>
-            </a:r>
-            <a:r>
-              <a:rPr lang="zh-TW" altLang="en-US" sz="6400" b="1" dirty="0">
-                <a:solidFill>
-                  <a:srgbClr val="660033"/>
-                </a:solidFill>
-                <a:latin typeface="Microsoft JhengHei" panose="020B0604030504040204" pitchFamily="34" charset="-120"/>
-                <a:ea typeface="Microsoft JhengHei" panose="020B0604030504040204" pitchFamily="34" charset="-120"/>
-              </a:rPr>
-              <a:t>  是</a:t>
-            </a:r>
-            <a:r>
-              <a:rPr lang="zh-TW" altLang="en-US" sz="6400" b="1" dirty="0">
-                <a:solidFill>
-                  <a:srgbClr val="660033"/>
-                </a:solidFill>
-                <a:latin typeface="Microsoft JhengHei" panose="020B0604030504040204" pitchFamily="34" charset="-120"/>
-                <a:ea typeface="Microsoft JhengHei" panose="020B0604030504040204" pitchFamily="34" charset="-120"/>
-              </a:rPr>
-              <a:t>祢的光采 </a:t>
+              <a:t>謝謝祢的愛   是祢的光采 </a:t>
             </a:r>
             <a:endParaRPr lang="en-US" altLang="zh-TW" sz="6400" b="1" dirty="0">
               <a:solidFill>
@@ -3723,7 +3618,6 @@
                 <a:solidFill>
                   <a:srgbClr val="660033"/>
                 </a:solidFill>
-                <a:effectLst/>
                 <a:latin typeface="Microsoft JhengHei" panose="020B0604030504040204" pitchFamily="34" charset="-120"/>
                 <a:ea typeface="Microsoft JhengHei" panose="020B0604030504040204" pitchFamily="34" charset="-120"/>
               </a:rPr>
@@ -3734,39 +3628,25 @@
                 <a:solidFill>
                   <a:srgbClr val="660033"/>
                 </a:solidFill>
-                <a:effectLst/>
                 <a:latin typeface="Microsoft JhengHei" panose="020B0604030504040204" pitchFamily="34" charset="-120"/>
                 <a:ea typeface="Microsoft JhengHei" panose="020B0604030504040204" pitchFamily="34" charset="-120"/>
               </a:rPr>
-              <a:t>正</a:t>
+              <a:t>正歌</a:t>
             </a:r>
             <a:r>
               <a:rPr lang="en-US" sz="4800" b="1" dirty="0">
                 <a:solidFill>
                   <a:srgbClr val="660033"/>
                 </a:solidFill>
-                <a:effectLst/>
                 <a:latin typeface="Microsoft JhengHei" panose="020B0604030504040204" pitchFamily="34" charset="-120"/>
                 <a:ea typeface="Microsoft JhengHei" panose="020B0604030504040204" pitchFamily="34" charset="-120"/>
               </a:rPr>
-              <a:t> </a:t>
-            </a:r>
-            <a:r>
-              <a:rPr lang="en-US" sz="4800" b="1" dirty="0">
-                <a:solidFill>
-                  <a:srgbClr val="660033"/>
-                </a:solidFill>
-                <a:effectLst/>
-                <a:latin typeface="Microsoft JhengHei" panose="020B0604030504040204" pitchFamily="34" charset="-120"/>
-                <a:ea typeface="Microsoft JhengHei" panose="020B0604030504040204" pitchFamily="34" charset="-120"/>
-              </a:rPr>
-              <a:t>)</a:t>
+              <a:t> )</a:t>
             </a:r>
             <a:endParaRPr lang="vi-VN" sz="4800" b="1" dirty="0">
               <a:solidFill>
                 <a:srgbClr val="660033"/>
               </a:solidFill>
-              <a:effectLst/>
               <a:ea typeface="Microsoft JhengHei" panose="020B0604030504040204" pitchFamily="34" charset="-120"/>
             </a:endParaRPr>
           </a:p>
@@ -3835,27 +3715,7 @@
                 <a:latin typeface="Microsoft JhengHei" panose="020B0604030504040204" pitchFamily="34" charset="-120"/>
                 <a:ea typeface="Microsoft JhengHei" panose="020B0604030504040204" pitchFamily="34" charset="-120"/>
               </a:rPr>
-              <a:t>祢光照我每天 </a:t>
-            </a:r>
-            <a:r>
-              <a:rPr lang="zh-TW" altLang="en-US" sz="6400" b="1" dirty="0">
-                <a:solidFill>
-                  <a:srgbClr val="660033"/>
-                </a:solidFill>
-                <a:latin typeface="Microsoft JhengHei" panose="020B0604030504040204" pitchFamily="34" charset="-120"/>
-                <a:ea typeface="Microsoft JhengHei" panose="020B0604030504040204" pitchFamily="34" charset="-120"/>
-              </a:rPr>
-              <a:t>  能</a:t>
-            </a:r>
-            <a:r>
-              <a:rPr lang="zh-TW" altLang="en-US" sz="6400" b="1" dirty="0">
-                <a:solidFill>
-                  <a:srgbClr val="660033"/>
-                </a:solidFill>
-                <a:latin typeface="Microsoft JhengHei" panose="020B0604030504040204" pitchFamily="34" charset="-120"/>
-                <a:ea typeface="Microsoft JhengHei" panose="020B0604030504040204" pitchFamily="34" charset="-120"/>
-              </a:rPr>
-              <a:t>指引我方向 </a:t>
+              <a:t>祢光照我每天   能指引我方向 </a:t>
             </a:r>
             <a:endParaRPr lang="en-US" altLang="zh-TW" sz="6400" b="1" dirty="0">
               <a:solidFill>
@@ -3877,27 +3737,7 @@
                 <a:latin typeface="Microsoft JhengHei" panose="020B0604030504040204" pitchFamily="34" charset="-120"/>
                 <a:ea typeface="Microsoft JhengHei" panose="020B0604030504040204" pitchFamily="34" charset="-120"/>
               </a:rPr>
-              <a:t>一生也願意 </a:t>
-            </a:r>
-            <a:r>
-              <a:rPr lang="zh-TW" altLang="en-US" sz="6400" b="1" dirty="0">
-                <a:solidFill>
-                  <a:srgbClr val="660033"/>
-                </a:solidFill>
-                <a:latin typeface="Microsoft JhengHei" panose="020B0604030504040204" pitchFamily="34" charset="-120"/>
-                <a:ea typeface="Microsoft JhengHei" panose="020B0604030504040204" pitchFamily="34" charset="-120"/>
-              </a:rPr>
-              <a:t>  為</a:t>
-            </a:r>
-            <a:r>
-              <a:rPr lang="zh-TW" altLang="en-US" sz="6400" b="1" dirty="0">
-                <a:solidFill>
-                  <a:srgbClr val="660033"/>
-                </a:solidFill>
-                <a:latin typeface="Microsoft JhengHei" panose="020B0604030504040204" pitchFamily="34" charset="-120"/>
-                <a:ea typeface="Microsoft JhengHei" panose="020B0604030504040204" pitchFamily="34" charset="-120"/>
-              </a:rPr>
-              <a:t>主擺上</a:t>
+              <a:t>一生也願意   為主擺上</a:t>
             </a:r>
             <a:endParaRPr lang="vi-VN" sz="6400" b="1" dirty="0">
               <a:solidFill>
@@ -3937,7 +3777,6 @@
                 <a:solidFill>
                   <a:srgbClr val="660033"/>
                 </a:solidFill>
-                <a:effectLst/>
                 <a:latin typeface="Microsoft JhengHei" panose="020B0604030504040204" pitchFamily="34" charset="-120"/>
                 <a:ea typeface="Microsoft JhengHei" panose="020B0604030504040204" pitchFamily="34" charset="-120"/>
               </a:rPr>
@@ -3948,39 +3787,25 @@
                 <a:solidFill>
                   <a:srgbClr val="660033"/>
                 </a:solidFill>
-                <a:effectLst/>
                 <a:latin typeface="Microsoft JhengHei" panose="020B0604030504040204" pitchFamily="34" charset="-120"/>
                 <a:ea typeface="Microsoft JhengHei" panose="020B0604030504040204" pitchFamily="34" charset="-120"/>
               </a:rPr>
-              <a:t>正</a:t>
+              <a:t>正歌</a:t>
             </a:r>
             <a:r>
               <a:rPr lang="en-US" sz="4800" b="1" dirty="0">
                 <a:solidFill>
                   <a:srgbClr val="660033"/>
                 </a:solidFill>
-                <a:effectLst/>
                 <a:latin typeface="Microsoft JhengHei" panose="020B0604030504040204" pitchFamily="34" charset="-120"/>
                 <a:ea typeface="Microsoft JhengHei" panose="020B0604030504040204" pitchFamily="34" charset="-120"/>
               </a:rPr>
-              <a:t> </a:t>
-            </a:r>
-            <a:r>
-              <a:rPr lang="en-US" sz="4800" b="1" dirty="0">
-                <a:solidFill>
-                  <a:srgbClr val="660033"/>
-                </a:solidFill>
-                <a:effectLst/>
-                <a:latin typeface="Microsoft JhengHei" panose="020B0604030504040204" pitchFamily="34" charset="-120"/>
-                <a:ea typeface="Microsoft JhengHei" panose="020B0604030504040204" pitchFamily="34" charset="-120"/>
-              </a:rPr>
-              <a:t>)</a:t>
+              <a:t> )</a:t>
             </a:r>
             <a:endParaRPr lang="vi-VN" sz="4800" b="1" dirty="0">
               <a:solidFill>
                 <a:srgbClr val="660033"/>
               </a:solidFill>
-              <a:effectLst/>
               <a:ea typeface="Microsoft JhengHei" panose="020B0604030504040204" pitchFamily="34" charset="-120"/>
             </a:endParaRPr>
           </a:p>
@@ -4071,27 +3896,7 @@
                 <a:latin typeface="Microsoft JhengHei" panose="020B0604030504040204" pitchFamily="34" charset="-120"/>
                 <a:ea typeface="Microsoft JhengHei" panose="020B0604030504040204" pitchFamily="34" charset="-120"/>
               </a:rPr>
-              <a:t>誰人可替代祢 </a:t>
-            </a:r>
-            <a:r>
-              <a:rPr lang="zh-TW" altLang="en-US" sz="6400" b="1" dirty="0">
-                <a:solidFill>
-                  <a:srgbClr val="660033"/>
-                </a:solidFill>
-                <a:latin typeface="Microsoft JhengHei" panose="020B0604030504040204" pitchFamily="34" charset="-120"/>
-                <a:ea typeface="Microsoft JhengHei" panose="020B0604030504040204" pitchFamily="34" charset="-120"/>
-              </a:rPr>
-              <a:t>  怎</a:t>
-            </a:r>
-            <a:r>
-              <a:rPr lang="zh-TW" altLang="en-US" sz="6400" b="1" dirty="0">
-                <a:solidFill>
-                  <a:srgbClr val="660033"/>
-                </a:solidFill>
-                <a:latin typeface="Microsoft JhengHei" panose="020B0604030504040204" pitchFamily="34" charset="-120"/>
-                <a:ea typeface="Microsoft JhengHei" panose="020B0604030504040204" pitchFamily="34" charset="-120"/>
-              </a:rPr>
-              <a:t>麼可相比 </a:t>
+              <a:t>誰人可替代祢   怎麼可相比 </a:t>
             </a:r>
             <a:endParaRPr lang="en-US" altLang="zh-TW" sz="6400" b="1" dirty="0">
               <a:solidFill>
@@ -4149,6 +3954,16 @@
               <a:t>副</a:t>
             </a:r>
             <a:r>
+              <a:rPr lang="zh-CN" altLang="en-US" sz="4800" b="1" dirty="0">
+                <a:solidFill>
+                  <a:srgbClr val="660033"/>
+                </a:solidFill>
+                <a:latin typeface="Microsoft JhengHei" panose="020B0604030504040204" pitchFamily="34" charset="-120"/>
+                <a:ea typeface="Microsoft JhengHei" panose="020B0604030504040204" pitchFamily="34" charset="-120"/>
+              </a:rPr>
+              <a:t>歌</a:t>
+            </a:r>
+            <a:r>
               <a:rPr lang="en-US" sz="4800" b="1" dirty="0">
                 <a:solidFill>
                   <a:srgbClr val="660033"/>
@@ -4157,18 +3972,7 @@
                 <a:latin typeface="Microsoft JhengHei" panose="020B0604030504040204" pitchFamily="34" charset="-120"/>
                 <a:ea typeface="Microsoft JhengHei" panose="020B0604030504040204" pitchFamily="34" charset="-120"/>
               </a:rPr>
-              <a:t> </a:t>
-            </a:r>
-            <a:r>
-              <a:rPr lang="en-US" sz="4800" b="1" dirty="0">
-                <a:solidFill>
-                  <a:srgbClr val="660033"/>
-                </a:solidFill>
-                <a:effectLst/>
-                <a:latin typeface="Microsoft JhengHei" panose="020B0604030504040204" pitchFamily="34" charset="-120"/>
-                <a:ea typeface="Microsoft JhengHei" panose="020B0604030504040204" pitchFamily="34" charset="-120"/>
-              </a:rPr>
-              <a:t>)</a:t>
+              <a:t> )</a:t>
             </a:r>
             <a:endParaRPr lang="vi-VN" sz="4800" b="1" dirty="0">
               <a:solidFill>
@@ -4243,27 +4047,7 @@
                 <a:latin typeface="Microsoft JhengHei" panose="020B0604030504040204" pitchFamily="34" charset="-120"/>
                 <a:ea typeface="Microsoft JhengHei" panose="020B0604030504040204" pitchFamily="34" charset="-120"/>
               </a:rPr>
-              <a:t>我單單想與祢一起 </a:t>
-            </a:r>
-            <a:r>
-              <a:rPr lang="zh-TW" altLang="en-US" sz="6400" b="1" dirty="0">
-                <a:solidFill>
-                  <a:srgbClr val="660033"/>
-                </a:solidFill>
-                <a:latin typeface="Microsoft JhengHei" panose="020B0604030504040204" pitchFamily="34" charset="-120"/>
-                <a:ea typeface="Microsoft JhengHei" panose="020B0604030504040204" pitchFamily="34" charset="-120"/>
-              </a:rPr>
-              <a:t>  救</a:t>
-            </a:r>
-            <a:r>
-              <a:rPr lang="zh-TW" altLang="en-US" sz="6400" b="1" dirty="0">
-                <a:solidFill>
-                  <a:srgbClr val="660033"/>
-                </a:solidFill>
-                <a:latin typeface="Microsoft JhengHei" panose="020B0604030504040204" pitchFamily="34" charset="-120"/>
-                <a:ea typeface="Microsoft JhengHei" panose="020B0604030504040204" pitchFamily="34" charset="-120"/>
-              </a:rPr>
-              <a:t>主多麼美 </a:t>
+              <a:t>我單單想與祢一起   救主多麼美 </a:t>
             </a:r>
             <a:endParaRPr lang="en-US" altLang="zh-TW" sz="6400" b="1" dirty="0">
               <a:solidFill>
@@ -4325,7 +4109,6 @@
                 <a:solidFill>
                   <a:srgbClr val="660033"/>
                 </a:solidFill>
-                <a:effectLst/>
                 <a:latin typeface="Microsoft JhengHei" panose="020B0604030504040204" pitchFamily="34" charset="-120"/>
                 <a:ea typeface="Microsoft JhengHei" panose="020B0604030504040204" pitchFamily="34" charset="-120"/>
               </a:rPr>
@@ -4336,39 +4119,25 @@
                 <a:solidFill>
                   <a:srgbClr val="660033"/>
                 </a:solidFill>
-                <a:effectLst/>
                 <a:latin typeface="Microsoft JhengHei" panose="020B0604030504040204" pitchFamily="34" charset="-120"/>
                 <a:ea typeface="Microsoft JhengHei" panose="020B0604030504040204" pitchFamily="34" charset="-120"/>
               </a:rPr>
-              <a:t>副</a:t>
+              <a:t>副歌</a:t>
             </a:r>
             <a:r>
               <a:rPr lang="en-US" sz="4800" b="1" dirty="0">
                 <a:solidFill>
                   <a:srgbClr val="660033"/>
                 </a:solidFill>
-                <a:effectLst/>
                 <a:latin typeface="Microsoft JhengHei" panose="020B0604030504040204" pitchFamily="34" charset="-120"/>
                 <a:ea typeface="Microsoft JhengHei" panose="020B0604030504040204" pitchFamily="34" charset="-120"/>
               </a:rPr>
-              <a:t> </a:t>
-            </a:r>
-            <a:r>
-              <a:rPr lang="en-US" sz="4800" b="1" dirty="0">
-                <a:solidFill>
-                  <a:srgbClr val="660033"/>
-                </a:solidFill>
-                <a:effectLst/>
-                <a:latin typeface="Microsoft JhengHei" panose="020B0604030504040204" pitchFamily="34" charset="-120"/>
-                <a:ea typeface="Microsoft JhengHei" panose="020B0604030504040204" pitchFamily="34" charset="-120"/>
-              </a:rPr>
-              <a:t>)</a:t>
+              <a:t> )</a:t>
             </a:r>
             <a:endParaRPr lang="vi-VN" sz="4800" b="1" dirty="0">
               <a:solidFill>
                 <a:srgbClr val="660033"/>
               </a:solidFill>
-              <a:effectLst/>
               <a:ea typeface="Microsoft JhengHei" panose="020B0604030504040204" pitchFamily="34" charset="-120"/>
             </a:endParaRPr>
           </a:p>
@@ -4459,27 +4228,7 @@
                 <a:latin typeface="Microsoft JhengHei" panose="020B0604030504040204" pitchFamily="34" charset="-120"/>
                 <a:ea typeface="Microsoft JhengHei" panose="020B0604030504040204" pitchFamily="34" charset="-120"/>
               </a:rPr>
-              <a:t>完全所有奉獻 </a:t>
-            </a:r>
-            <a:r>
-              <a:rPr lang="zh-TW" altLang="en-US" sz="6400" b="1" dirty="0">
-                <a:solidFill>
-                  <a:srgbClr val="660033"/>
-                </a:solidFill>
-                <a:latin typeface="Microsoft JhengHei" panose="020B0604030504040204" pitchFamily="34" charset="-120"/>
-                <a:ea typeface="Microsoft JhengHei" panose="020B0604030504040204" pitchFamily="34" charset="-120"/>
-              </a:rPr>
-              <a:t>  討</a:t>
-            </a:r>
-            <a:r>
-              <a:rPr lang="zh-TW" altLang="en-US" sz="6400" b="1" dirty="0">
-                <a:solidFill>
-                  <a:srgbClr val="660033"/>
-                </a:solidFill>
-                <a:latin typeface="Microsoft JhengHei" panose="020B0604030504040204" pitchFamily="34" charset="-120"/>
-                <a:ea typeface="Microsoft JhengHei" panose="020B0604030504040204" pitchFamily="34" charset="-120"/>
-              </a:rPr>
-              <a:t>主的歡喜 </a:t>
+              <a:t>完全所有奉獻   討主的歡喜 </a:t>
             </a:r>
             <a:endParaRPr lang="en-US" altLang="zh-TW" sz="6400" b="1" dirty="0">
               <a:solidFill>
@@ -4519,7 +4268,6 @@
                 <a:solidFill>
                   <a:srgbClr val="660033"/>
                 </a:solidFill>
-                <a:effectLst/>
                 <a:latin typeface="Microsoft JhengHei" panose="020B0604030504040204" pitchFamily="34" charset="-120"/>
                 <a:ea typeface="Microsoft JhengHei" panose="020B0604030504040204" pitchFamily="34" charset="-120"/>
               </a:rPr>
@@ -4530,39 +4278,25 @@
                 <a:solidFill>
                   <a:srgbClr val="660033"/>
                 </a:solidFill>
-                <a:effectLst/>
                 <a:latin typeface="Microsoft JhengHei" panose="020B0604030504040204" pitchFamily="34" charset="-120"/>
                 <a:ea typeface="Microsoft JhengHei" panose="020B0604030504040204" pitchFamily="34" charset="-120"/>
               </a:rPr>
-              <a:t>副</a:t>
+              <a:t>副歌</a:t>
             </a:r>
             <a:r>
               <a:rPr lang="en-US" sz="4800" b="1" dirty="0">
                 <a:solidFill>
                   <a:srgbClr val="660033"/>
                 </a:solidFill>
-                <a:effectLst/>
                 <a:latin typeface="Microsoft JhengHei" panose="020B0604030504040204" pitchFamily="34" charset="-120"/>
                 <a:ea typeface="Microsoft JhengHei" panose="020B0604030504040204" pitchFamily="34" charset="-120"/>
               </a:rPr>
-              <a:t> </a:t>
-            </a:r>
-            <a:r>
-              <a:rPr lang="en-US" sz="4800" b="1" dirty="0">
-                <a:solidFill>
-                  <a:srgbClr val="660033"/>
-                </a:solidFill>
-                <a:effectLst/>
-                <a:latin typeface="Microsoft JhengHei" panose="020B0604030504040204" pitchFamily="34" charset="-120"/>
-                <a:ea typeface="Microsoft JhengHei" panose="020B0604030504040204" pitchFamily="34" charset="-120"/>
-              </a:rPr>
-              <a:t>)</a:t>
+              <a:t> )</a:t>
             </a:r>
             <a:endParaRPr lang="vi-VN" sz="4800" b="1" dirty="0">
               <a:solidFill>
                 <a:srgbClr val="660033"/>
               </a:solidFill>
-              <a:effectLst/>
               <a:ea typeface="Microsoft JhengHei" panose="020B0604030504040204" pitchFamily="34" charset="-120"/>
             </a:endParaRPr>
           </a:p>
@@ -4631,27 +4365,7 @@
                 <a:latin typeface="Microsoft JhengHei" panose="020B0604030504040204" pitchFamily="34" charset="-120"/>
                 <a:ea typeface="Microsoft JhengHei" panose="020B0604030504040204" pitchFamily="34" charset="-120"/>
               </a:rPr>
-              <a:t>我的福氣 </a:t>
-            </a:r>
-            <a:r>
-              <a:rPr lang="zh-TW" altLang="en-US" sz="6400" b="1" dirty="0">
-                <a:solidFill>
-                  <a:srgbClr val="660033"/>
-                </a:solidFill>
-                <a:latin typeface="Microsoft JhengHei" panose="020B0604030504040204" pitchFamily="34" charset="-120"/>
-                <a:ea typeface="Microsoft JhengHei" panose="020B0604030504040204" pitchFamily="34" charset="-120"/>
-              </a:rPr>
-              <a:t>  我</a:t>
-            </a:r>
-            <a:r>
-              <a:rPr lang="zh-TW" altLang="en-US" sz="6400" b="1" dirty="0">
-                <a:solidFill>
-                  <a:srgbClr val="660033"/>
-                </a:solidFill>
-                <a:latin typeface="Microsoft JhengHei" panose="020B0604030504040204" pitchFamily="34" charset="-120"/>
-                <a:ea typeface="Microsoft JhengHei" panose="020B0604030504040204" pitchFamily="34" charset="-120"/>
-              </a:rPr>
-              <a:t>心想祢 </a:t>
+              <a:t>我的福氣   我心想祢 </a:t>
             </a:r>
             <a:endParaRPr lang="en-US" altLang="zh-TW" sz="6400" b="1" dirty="0">
               <a:solidFill>
@@ -4713,7 +4427,6 @@
                 <a:solidFill>
                   <a:srgbClr val="660033"/>
                 </a:solidFill>
-                <a:effectLst/>
                 <a:latin typeface="Microsoft JhengHei" panose="020B0604030504040204" pitchFamily="34" charset="-120"/>
                 <a:ea typeface="Microsoft JhengHei" panose="020B0604030504040204" pitchFamily="34" charset="-120"/>
               </a:rPr>
@@ -4724,39 +4437,25 @@
                 <a:solidFill>
                   <a:srgbClr val="660033"/>
                 </a:solidFill>
-                <a:effectLst/>
                 <a:latin typeface="Microsoft JhengHei" panose="020B0604030504040204" pitchFamily="34" charset="-120"/>
                 <a:ea typeface="Microsoft JhengHei" panose="020B0604030504040204" pitchFamily="34" charset="-120"/>
               </a:rPr>
-              <a:t>副</a:t>
+              <a:t>副歌</a:t>
             </a:r>
             <a:r>
               <a:rPr lang="en-US" sz="4800" b="1" dirty="0">
                 <a:solidFill>
                   <a:srgbClr val="660033"/>
                 </a:solidFill>
-                <a:effectLst/>
                 <a:latin typeface="Microsoft JhengHei" panose="020B0604030504040204" pitchFamily="34" charset="-120"/>
                 <a:ea typeface="Microsoft JhengHei" panose="020B0604030504040204" pitchFamily="34" charset="-120"/>
               </a:rPr>
-              <a:t> </a:t>
-            </a:r>
-            <a:r>
-              <a:rPr lang="en-US" sz="4800" b="1" dirty="0">
-                <a:solidFill>
-                  <a:srgbClr val="660033"/>
-                </a:solidFill>
-                <a:effectLst/>
-                <a:latin typeface="Microsoft JhengHei" panose="020B0604030504040204" pitchFamily="34" charset="-120"/>
-                <a:ea typeface="Microsoft JhengHei" panose="020B0604030504040204" pitchFamily="34" charset="-120"/>
-              </a:rPr>
-              <a:t>)</a:t>
+              <a:t> )</a:t>
             </a:r>
             <a:endParaRPr lang="vi-VN" sz="4800" b="1" dirty="0">
               <a:solidFill>
                 <a:srgbClr val="660033"/>
               </a:solidFill>
-              <a:effectLst/>
               <a:ea typeface="Microsoft JhengHei" panose="020B0604030504040204" pitchFamily="34" charset="-120"/>
             </a:endParaRPr>
           </a:p>
